--- a/system-design-101/vi/lessons/sd-02-013/slides/sd-02-013.pptx
+++ b/system-design-101/vi/lessons/sd-02-013/slides/sd-02-013.pptx
@@ -13556,7 +13556,18 @@
                 <a:ea typeface="Be Vietnam Pro" pitchFamily="34" charset="-122"/>
                 <a:cs typeface="Be Vietnam Pro" pitchFamily="34" charset="-120"/>
               </a:rPr>
-              <a:t> nằm chờ,</a:t>
+              <a:t> có</a:t>
+            </a:r>
+            <a:r>
+              <a:rPr lang="en-US" sz="2850" dirty="0" spc="0" kern="0">
+                <a:solidFill>
+                  <a:srgbClr val="E4E1D8"/>
+                </a:solidFill>
+                <a:latin typeface="Be Vietnam Pro" pitchFamily="34" charset="0"/>
+                <a:ea typeface="Be Vietnam Pro" pitchFamily="34" charset="-122"/>
+                <a:cs typeface="Be Vietnam Pro" pitchFamily="34" charset="-120"/>
+              </a:rPr>
+              <a:t> thể</a:t>
             </a:r>
             <a:r>
               <a:rPr lang="en-US" sz="2850" dirty="0" spc="-2" kern="0">
@@ -13567,10 +13578,10 @@
                 <a:ea typeface="Be Vietnam Pro" pitchFamily="34" charset="-122"/>
                 <a:cs typeface="Be Vietnam Pro" pitchFamily="34" charset="-120"/>
               </a:rPr>
-              <a:t> không</a:t>
-            </a:r>
-            <a:r>
-              <a:rPr lang="en-US" sz="2850" dirty="0" spc="-12" kern="0">
+              <a:t> nằm</a:t>
+            </a:r>
+            <a:r>
+              <a:rPr lang="en-US" sz="2850" dirty="0" spc="0" kern="0">
                 <a:solidFill>
                   <a:srgbClr val="E4E1D8"/>
                 </a:solidFill>
@@ -13578,7 +13589,84 @@
                 <a:ea typeface="Be Vietnam Pro" pitchFamily="34" charset="-122"/>
                 <a:cs typeface="Be Vietnam Pro" pitchFamily="34" charset="-120"/>
               </a:rPr>
-              <a:t> mất.</a:t>
+              <a:t> chờ, nếu</a:t>
+            </a:r>
+            <a:r>
+              <a:rPr lang="en-US" sz="2850" dirty="0" spc="-1" kern="0">
+                <a:solidFill>
+                  <a:srgbClr val="E4E1D8"/>
+                </a:solidFill>
+                <a:latin typeface="Be Vietnam Pro" pitchFamily="34" charset="0"/>
+                <a:ea typeface="Be Vietnam Pro" pitchFamily="34" charset="-122"/>
+                <a:cs typeface="Be Vietnam Pro" pitchFamily="34" charset="-120"/>
+              </a:rPr>
+              <a:t> hàng</a:t>
+            </a:r>
+            <a:r>
+              <a:rPr lang="en-US" sz="2850" dirty="0" spc="15" kern="0">
+                <a:solidFill>
+                  <a:srgbClr val="E4E1D8"/>
+                </a:solidFill>
+                <a:latin typeface="Be Vietnam Pro" pitchFamily="34" charset="0"/>
+                <a:ea typeface="Be Vietnam Pro" pitchFamily="34" charset="-122"/>
+                <a:cs typeface="Be Vietnam Pro" pitchFamily="34" charset="-120"/>
+              </a:rPr>
+              <a:t> đợi</a:t>
+            </a:r>
+            <a:r>
+              <a:rPr lang="en-US" sz="2850" dirty="0" spc="24" kern="0">
+                <a:solidFill>
+                  <a:srgbClr val="E4E1D8"/>
+                </a:solidFill>
+                <a:latin typeface="Be Vietnam Pro" pitchFamily="34" charset="0"/>
+                <a:ea typeface="Be Vietnam Pro" pitchFamily="34" charset="-122"/>
+                <a:cs typeface="Be Vietnam Pro" pitchFamily="34" charset="-120"/>
+              </a:rPr>
+              <a:t> lưu</a:t>
+            </a:r>
+            <a:r>
+              <a:rPr lang="en-US" sz="2850" dirty="0" spc="-5" kern="0">
+                <a:solidFill>
+                  <a:srgbClr val="E4E1D8"/>
+                </a:solidFill>
+                <a:latin typeface="Be Vietnam Pro" pitchFamily="34" charset="0"/>
+                <a:ea typeface="Be Vietnam Pro" pitchFamily="34" charset="-122"/>
+                <a:cs typeface="Be Vietnam Pro" pitchFamily="34" charset="-120"/>
+              </a:rPr>
+              <a:t> bền</a:t>
+            </a:r>
+            <a:r>
+              <a:rPr lang="en-US" sz="2850" dirty="0" spc="-16" kern="0">
+                <a:solidFill>
+                  <a:srgbClr val="E4E1D8"/>
+                </a:solidFill>
+                <a:latin typeface="Be Vietnam Pro" pitchFamily="34" charset="0"/>
+                <a:ea typeface="Be Vietnam Pro" pitchFamily="34" charset="-122"/>
+                <a:cs typeface="Be Vietnam Pro" pitchFamily="34" charset="-120"/>
+              </a:rPr>
+              <a:t> và</a:t>
+            </a:r>
+            <a:r>
+              <a:rPr lang="en-US" sz="2850" dirty="0" spc="-1" kern="0">
+                <a:solidFill>
+                  <a:srgbClr val="E4E1D8"/>
+                </a:solidFill>
+                <a:latin typeface="Be Vietnam Pro" pitchFamily="34" charset="0"/>
+                <a:ea typeface="Be Vietnam Pro" pitchFamily="34" charset="-122"/>
+                <a:cs typeface="Be Vietnam Pro" pitchFamily="34" charset="-120"/>
+              </a:rPr>
+              <a:t> có thử</a:t>
+            </a:r>
+            <a:r>
+              <a:rPr lang="en-US" sz="2850" dirty="0" spc="2" kern="0">
+                <a:solidFill>
+                  <a:srgbClr val="E4E1D8"/>
+                </a:solidFill>
+                <a:latin typeface="Be Vietnam Pro" pitchFamily="34" charset="0"/>
+                <a:ea typeface="Be Vietnam Pro" pitchFamily="34" charset="-122"/>
+                <a:cs typeface="Be Vietnam Pro" pitchFamily="34" charset="-120"/>
+              </a:rPr>
+              <a:t> lại.</a:t>
             </a:r>
             <a:endParaRPr lang="en-US" sz="2850" dirty="0"/>
           </a:p>

--- a/system-design-101/vi/lessons/sd-02-013/slides/sd-02-013.pptx
+++ b/system-design-101/vi/lessons/sd-02-013/slides/sd-02-013.pptx
@@ -6179,7 +6179,40 @@
                 <a:ea typeface="Bricolage Grotesque ExtraBold" pitchFamily="34" charset="-122"/>
                 <a:cs typeface="Bricolage Grotesque ExtraBold" pitchFamily="34" charset="-120"/>
               </a:rPr>
-              <a:t> tuyến: hàng</a:t>
+              <a:t> tuyến:</a:t>
+            </a:r>
+            <a:r>
+              <a:rPr lang="en-US" sz="3450" dirty="0" spc="-32" kern="0">
+                <a:solidFill>
+                  <a:srgbClr val="F3EEE3"/>
+                </a:solidFill>
+                <a:latin typeface="Bricolage Grotesque ExtraBold" pitchFamily="34" charset="0"/>
+                <a:ea typeface="Bricolage Grotesque ExtraBold" pitchFamily="34" charset="-122"/>
+                <a:cs typeface="Bricolage Grotesque ExtraBold" pitchFamily="34" charset="-120"/>
+              </a:rPr>
+              <a:t> thường</a:t>
+            </a:r>
+            <a:r>
+              <a:rPr lang="en-US" sz="3450" dirty="0" spc="-2" kern="0">
+                <a:solidFill>
+                  <a:srgbClr val="F3EEE3"/>
+                </a:solidFill>
+                <a:latin typeface="Bricolage Grotesque ExtraBold" pitchFamily="34" charset="0"/>
+                <a:ea typeface="Bricolage Grotesque ExtraBold" pitchFamily="34" charset="-122"/>
+                <a:cs typeface="Bricolage Grotesque ExtraBold" pitchFamily="34" charset="-120"/>
+              </a:rPr>
+              <a:t> là</a:t>
+            </a:r>
+            <a:r>
+              <a:rPr lang="en-US" sz="3450" dirty="0" spc="0" kern="0">
+                <a:solidFill>
+                  <a:srgbClr val="F3EEE3"/>
+                </a:solidFill>
+                <a:latin typeface="Bricolage Grotesque ExtraBold" pitchFamily="34" charset="0"/>
+                <a:ea typeface="Bricolage Grotesque ExtraBold" pitchFamily="34" charset="-122"/>
+                <a:cs typeface="Bricolage Grotesque ExtraBold" pitchFamily="34" charset="-120"/>
+              </a:rPr>
+              <a:t> hàng</a:t>
             </a:r>
             <a:r>
               <a:rPr lang="en-US" sz="3450" dirty="0" spc="-10" kern="0">
@@ -7320,7 +7353,7 @@
               <a:buNone/>
             </a:pPr>
             <a:r>
-              <a:rPr lang="en-US" sz="2550" dirty="0" spc="7" kern="0">
+              <a:rPr lang="en-US" sz="2550" dirty="0" spc="0" kern="0">
                 <a:solidFill>
                   <a:srgbClr val="E4E1D8"/>
                 </a:solidFill>
@@ -7328,40 +7361,7 @@
                 <a:ea typeface="Be Vietnam Pro" pitchFamily="34" charset="-122"/>
                 <a:cs typeface="Be Vietnam Pro" pitchFamily="34" charset="-120"/>
               </a:rPr>
-              <a:t>Người</a:t>
-            </a:r>
-            <a:r>
-              <a:rPr lang="en-US" sz="2550" dirty="0" spc="-1" kern="0">
-                <a:solidFill>
-                  <a:srgbClr val="E4E1D8"/>
-                </a:solidFill>
-                <a:latin typeface="Be Vietnam Pro" pitchFamily="34" charset="0"/>
-                <a:ea typeface="Be Vietnam Pro" pitchFamily="34" charset="-122"/>
-                <a:cs typeface="Be Vietnam Pro" pitchFamily="34" charset="-120"/>
-              </a:rPr>
-              <a:t> dùng</a:t>
-            </a:r>
-            <a:r>
-              <a:rPr lang="en-US" sz="2550" dirty="0" spc="21" kern="0">
-                <a:solidFill>
-                  <a:srgbClr val="E4E1D8"/>
-                </a:solidFill>
-                <a:latin typeface="Be Vietnam Pro" pitchFamily="34" charset="0"/>
-                <a:ea typeface="Be Vietnam Pro" pitchFamily="34" charset="-122"/>
-                <a:cs typeface="Be Vietnam Pro" pitchFamily="34" charset="-120"/>
-              </a:rPr>
-              <a:t> định</a:t>
-            </a:r>
-            <a:r>
-              <a:rPr lang="en-US" sz="2550" dirty="0" spc="0" kern="0">
-                <a:solidFill>
-                  <a:srgbClr val="E4E1D8"/>
-                </a:solidFill>
-                <a:latin typeface="Be Vietnam Pro" pitchFamily="34" charset="0"/>
-                <a:ea typeface="Be Vietnam Pro" pitchFamily="34" charset="-122"/>
-                <a:cs typeface="Be Vietnam Pro" pitchFamily="34" charset="-120"/>
-              </a:rPr>
-              <a:t> nghĩa</a:t>
+              <a:t>Định nghĩa</a:t>
             </a:r>
             <a:r>
               <a:rPr lang="en-US" sz="2550" dirty="0" spc="6" kern="0">
@@ -8207,7 +8207,7 @@
               <a:t>Một</a:t>
             </a:r>
             <a:r>
-              <a:rPr lang="en-US" sz="6900" dirty="0" spc="2" kern="0">
+              <a:rPr lang="en-US" sz="6900" dirty="0" spc="0" kern="0">
                 <a:solidFill>
                   <a:srgbClr val="14161C"/>
                 </a:solidFill>
@@ -8215,10 +8215,10 @@
                 <a:ea typeface="Bricolage Grotesque ExtraBold" pitchFamily="34" charset="-122"/>
                 <a:cs typeface="Bricolage Grotesque ExtraBold" pitchFamily="34" charset="-120"/>
               </a:rPr>
-              <a:t> hàng</a:t>
-            </a:r>
-            <a:r>
-              <a:rPr lang="en-US" sz="6900" dirty="0" spc="-20" kern="0">
+              <a:t> bộ</a:t>
+            </a:r>
+            <a:r>
+              <a:rPr lang="en-US" sz="6900" dirty="0" spc="22" kern="0">
                 <a:solidFill>
                   <a:srgbClr val="14161C"/>
                 </a:solidFill>
@@ -8226,10 +8226,10 @@
                 <a:ea typeface="Bricolage Grotesque ExtraBold" pitchFamily="34" charset="-122"/>
                 <a:cs typeface="Bricolage Grotesque ExtraBold" pitchFamily="34" charset="-120"/>
               </a:rPr>
-              <a:t> đợi,</a:t>
-            </a:r>
-            <a:r>
-              <a:rPr lang="en-US" sz="6900" dirty="0" spc="1" kern="0">
+              <a:t> định</a:t>
+            </a:r>
+            <a:r>
+              <a:rPr lang="en-US" sz="6900" dirty="0" spc="3" kern="0">
                 <a:solidFill>
                   <a:srgbClr val="14161C"/>
                 </a:solidFill>
@@ -8237,10 +8237,10 @@
                 <a:ea typeface="Bricolage Grotesque ExtraBold" pitchFamily="34" charset="-122"/>
                 <a:cs typeface="Bricolage Grotesque ExtraBold" pitchFamily="34" charset="-120"/>
               </a:rPr>
-              <a:t> bốn</a:t>
-            </a:r>
-            <a:r>
-              <a:rPr lang="en-US" sz="6900" dirty="0" spc="-65" kern="0">
+              <a:t> tuyến,</a:t>
+            </a:r>
+            <a:r>
+              <a:rPr lang="en-US" sz="6900" dirty="0" spc="0" kern="0">
                 <a:solidFill>
                   <a:srgbClr val="14161C"/>
                 </a:solidFill>
@@ -8248,10 +8248,21 @@
                 <a:ea typeface="Bricolage Grotesque ExtraBold" pitchFamily="34" charset="-122"/>
                 <a:cs typeface="Bricolage Grotesque ExtraBold" pitchFamily="34" charset="-120"/>
               </a:rPr>
+              <a:t> bốn</a:t>
+            </a:r>
+            <a:r>
+              <a:rPr lang="en-US" sz="6900" dirty="0" spc="-64" kern="0">
+                <a:solidFill>
+                  <a:srgbClr val="14161C"/>
+                </a:solidFill>
+                <a:latin typeface="Bricolage Grotesque ExtraBold" pitchFamily="34" charset="0"/>
+                <a:ea typeface="Bricolage Grotesque ExtraBold" pitchFamily="34" charset="-122"/>
+                <a:cs typeface="Bricolage Grotesque ExtraBold" pitchFamily="34" charset="-120"/>
+              </a:rPr>
               <a:t> đường</a:t>
             </a:r>
             <a:r>
-              <a:rPr lang="en-US" sz="6900" dirty="0" spc="-40" kern="0">
+              <a:rPr lang="en-US" sz="6900" dirty="0" spc="-41" kern="0">
                 <a:solidFill>
                   <a:srgbClr val="14161C"/>
                 </a:solidFill>
@@ -8376,7 +8387,7 @@
               <a:buNone/>
             </a:pPr>
             <a:r>
-              <a:rPr lang="en-US" sz="3900" dirty="0" spc="2" kern="0">
+              <a:rPr lang="en-US" sz="3900" dirty="0" spc="-40" kern="0">
                 <a:solidFill>
                   <a:srgbClr val="F3EEE3"/>
                 </a:solidFill>
@@ -8384,7 +8395,29 @@
                 <a:ea typeface="Bricolage Grotesque ExtraBold" pitchFamily="34" charset="-122"/>
                 <a:cs typeface="Bricolage Grotesque ExtraBold" pitchFamily="34" charset="-120"/>
               </a:rPr>
-              <a:t>Hàng</a:t>
+              <a:t>Thường</a:t>
+            </a:r>
+            <a:r>
+              <a:rPr lang="en-US" sz="3900" dirty="0" spc="2" kern="0">
+                <a:solidFill>
+                  <a:srgbClr val="F3EEE3"/>
+                </a:solidFill>
+                <a:latin typeface="Bricolage Grotesque ExtraBold" pitchFamily="34" charset="0"/>
+                <a:ea typeface="Bricolage Grotesque ExtraBold" pitchFamily="34" charset="-122"/>
+                <a:cs typeface="Bricolage Grotesque ExtraBold" pitchFamily="34" charset="-120"/>
+              </a:rPr>
+              <a:t> là</a:t>
+            </a:r>
+            <a:r>
+              <a:rPr lang="en-US" sz="3900" dirty="0" spc="5" kern="0">
+                <a:solidFill>
+                  <a:srgbClr val="F3EEE3"/>
+                </a:solidFill>
+                <a:latin typeface="Bricolage Grotesque ExtraBold" pitchFamily="34" charset="0"/>
+                <a:ea typeface="Bricolage Grotesque ExtraBold" pitchFamily="34" charset="-122"/>
+                <a:cs typeface="Bricolage Grotesque ExtraBold" pitchFamily="34" charset="-120"/>
+              </a:rPr>
+              <a:t> hàng</a:t>
             </a:r>
             <a:r>
               <a:rPr lang="en-US" sz="3900" dirty="0" spc="-10" kern="0">
